--- a/z_Auxilliary/Figures.pptx
+++ b/z_Auxilliary/Figures.pptx
@@ -235,7 +235,7 @@
               <a:lstStyle/>
               <a:p>
                 <a:pPr>
-                  <a:defRPr sz="2100" b="0" i="0" u="none" strike="noStrike" kern="1200" baseline="0">
+                  <a:defRPr sz="2200" b="0" i="0" u="none" strike="noStrike" kern="1200" baseline="0">
                     <a:solidFill>
                       <a:schemeClr val="tx1">
                         <a:lumMod val="75000"/>
@@ -505,7 +505,7 @@
           <a:lstStyle/>
           <a:p>
             <a:pPr>
-              <a:defRPr sz="2100" b="0" i="0" u="none" strike="noStrike" kern="1200" baseline="0">
+              <a:defRPr sz="2210" b="0" i="0" u="none" strike="noStrike" kern="1200" baseline="0">
                 <a:solidFill>
                   <a:schemeClr val="tx1">
                     <a:lumMod val="65000"/>
@@ -799,7 +799,7 @@
               <a:lstStyle/>
               <a:p>
                 <a:pPr>
-                  <a:defRPr sz="2100" b="0" i="0" u="none" strike="noStrike" kern="1200" baseline="0">
+                  <a:defRPr sz="2200" b="0" i="0" u="none" strike="noStrike" kern="1200" baseline="0">
                     <a:solidFill>
                       <a:schemeClr val="tx1">
                         <a:lumMod val="75000"/>
@@ -1069,7 +1069,7 @@
           <a:lstStyle/>
           <a:p>
             <a:pPr>
-              <a:defRPr lang="en-US" sz="2100" b="0" i="0" u="none" strike="noStrike" kern="1200" baseline="0">
+              <a:defRPr lang="en-US" sz="2210" b="0" i="0" u="none" strike="noStrike" kern="1200" baseline="0">
                 <a:solidFill>
                   <a:schemeClr val="tx1">
                     <a:lumMod val="65000"/>
@@ -1196,7 +1196,7 @@
           <a:lstStyle/>
           <a:p>
             <a:pPr>
-              <a:defRPr sz="1700" b="0" i="0" u="none" strike="noStrike" kern="1200" baseline="0">
+              <a:defRPr sz="1800" b="0" i="0" u="none" strike="noStrike" kern="1200" baseline="0">
                 <a:solidFill>
                   <a:schemeClr val="tx1">
                     <a:lumMod val="65000"/>
@@ -1473,6 +1473,62 @@
                   <c:y val="1.1718749279112373E-2"/>
                 </c:manualLayout>
               </c:layout>
+              <c:numFmt formatCode="0%" sourceLinked="0"/>
+              <c:spPr>
+                <a:solidFill>
+                  <a:prstClr val="white"/>
+                </a:solidFill>
+                <a:ln w="9525" cap="flat" cmpd="sng" algn="ctr">
+                  <a:solidFill>
+                    <a:prstClr val="black">
+                      <a:lumMod val="25000"/>
+                      <a:lumOff val="75000"/>
+                    </a:prstClr>
+                  </a:solidFill>
+                  <a:prstDash val="solid"/>
+                  <a:round/>
+                  <a:headEnd type="none" w="med" len="med"/>
+                  <a:tailEnd type="none" w="med" len="med"/>
+                  <a:extLst>
+                    <a:ext uri="{C807C97D-BFC1-408E-A445-0C87EB9F89A2}">
+                      <ask:lineSketchStyleProps xmlns:ask="http://schemas.microsoft.com/office/drawing/2018/sketchyshapes" sd="0">
+                        <a:custGeom>
+                          <a:avLst/>
+                          <a:gdLst/>
+                          <a:ahLst/>
+                          <a:cxnLst/>
+                          <a:rect l="0" t="0" r="0" b="0"/>
+                          <a:pathLst/>
+                        </a:custGeom>
+                        <ask:type/>
+                      </ask:lineSketchStyleProps>
+                    </a:ext>
+                  </a:extLst>
+                </a:ln>
+                <a:effectLst/>
+              </c:spPr>
+              <c:txPr>
+                <a:bodyPr rot="0" spcFirstLastPara="1" vertOverflow="clip" horzOverflow="clip" vert="horz" wrap="square" lIns="36576" tIns="18288" rIns="36576" bIns="18288" anchor="ctr" anchorCtr="1">
+                  <a:spAutoFit/>
+                </a:bodyPr>
+                <a:lstStyle/>
+                <a:p>
+                  <a:pPr>
+                    <a:defRPr sz="1700" b="0" i="0" u="none" strike="noStrike" kern="1200" baseline="0">
+                      <a:solidFill>
+                        <a:schemeClr val="dk1">
+                          <a:lumMod val="65000"/>
+                          <a:lumOff val="35000"/>
+                        </a:schemeClr>
+                      </a:solidFill>
+                      <a:latin typeface="+mn-lt"/>
+                      <a:ea typeface="+mn-ea"/>
+                      <a:cs typeface="+mn-cs"/>
+                    </a:defRPr>
+                  </a:pPr>
+                  <a:endParaRPr lang="de-DE"/>
+                </a:p>
+              </c:txPr>
               <c:dLblPos val="bestFit"/>
               <c:showLegendKey val="0"/>
               <c:showVal val="0"/>
@@ -1481,7 +1537,20 @@
               <c:showPercent val="1"/>
               <c:showBubbleSize val="0"/>
               <c:extLst>
-                <c:ext xmlns:c15="http://schemas.microsoft.com/office/drawing/2012/chart" uri="{CE6537A1-D6FC-4f65-9D91-7224C49458BB}"/>
+                <c:ext xmlns:c15="http://schemas.microsoft.com/office/drawing/2012/chart" uri="{CE6537A1-D6FC-4f65-9D91-7224C49458BB}">
+                  <c15:spPr xmlns:c15="http://schemas.microsoft.com/office/drawing/2012/chart">
+                    <a:prstGeom prst="wedgeRectCallout">
+                      <a:avLst>
+                        <a:gd name="adj1" fmla="val 97825"/>
+                        <a:gd name="adj2" fmla="val 46462"/>
+                      </a:avLst>
+                    </a:prstGeom>
+                    <a:noFill/>
+                    <a:ln>
+                      <a:noFill/>
+                    </a:ln>
+                  </c15:spPr>
+                </c:ext>
                 <c:ext xmlns:c16="http://schemas.microsoft.com/office/drawing/2014/chart" uri="{C3380CC4-5D6E-409C-BE32-E72D297353CC}">
                   <c16:uniqueId val="{00000004-2CDD-4FF5-BCC3-45E40CC5B0ED}"/>
                 </c:ext>
@@ -1575,7 +1644,7 @@
               <a:lstStyle/>
               <a:p>
                 <a:pPr>
-                  <a:defRPr sz="1600" b="0" i="0" u="none" strike="noStrike" kern="1200" baseline="0">
+                  <a:defRPr sz="1700" b="0" i="0" u="none" strike="noStrike" kern="1200" baseline="0">
                     <a:solidFill>
                       <a:schemeClr val="dk1">
                         <a:lumMod val="65000"/>
@@ -1911,7 +1980,7 @@
                       <a:buFontTx/>
                       <a:buNone/>
                       <a:tabLst/>
-                      <a:defRPr sz="1600" b="0" i="0" u="none" strike="noStrike" kern="1200" baseline="0">
+                      <a:defRPr sz="1700" b="0" i="0" u="none" strike="noStrike" kern="1200" baseline="0">
                         <a:solidFill>
                           <a:prstClr val="black">
                             <a:lumMod val="65000"/>
@@ -1923,36 +1992,19 @@
                         <a:cs typeface="+mn-cs"/>
                       </a:defRPr>
                     </a:pPr>
-                    <a:fld id="{B84DC96D-E640-4D77-BDF5-7D0B1CCD531A}" type="CATEGORYNAME">
-                      <a:rPr lang="en-US" sz="1600" smtClean="0"/>
-                      <a:pPr marL="0" marR="0" lvl="0" indent="0" algn="ctr" defTabSz="914400" rtl="0" eaLnBrk="1" fontAlgn="auto" latinLnBrk="0" hangingPunct="1">
-                        <a:lnSpc>
-                          <a:spcPct val="100000"/>
-                        </a:lnSpc>
-                        <a:spcBef>
-                          <a:spcPts val="0"/>
-                        </a:spcBef>
-                        <a:spcAft>
-                          <a:spcPts val="0"/>
-                        </a:spcAft>
-                        <a:buClrTx/>
-                        <a:buSzTx/>
-                        <a:buFontTx/>
-                        <a:buNone/>
-                        <a:tabLst/>
-                        <a:defRPr sz="1600">
-                          <a:solidFill>
-                            <a:prstClr val="black">
-                              <a:lumMod val="65000"/>
-                              <a:lumOff val="35000"/>
-                            </a:prstClr>
-                          </a:solidFill>
-                        </a:defRPr>
-                      </a:pPr>
-                      <a:t>[RUBRIKENNAME]</a:t>
-                    </a:fld>
                     <a:r>
-                      <a:rPr lang="en-US" sz="1600" b="0" i="0" u="none" strike="noStrike" kern="1200" baseline="0" dirty="0">
+                      <a:rPr lang="en-US" sz="1700" b="0" i="0" u="none" strike="noStrike" kern="1200" baseline="0" dirty="0" err="1">
+                        <a:solidFill>
+                          <a:prstClr val="black">
+                            <a:lumMod val="65000"/>
+                            <a:lumOff val="35000"/>
+                          </a:prstClr>
+                        </a:solidFill>
+                      </a:rPr>
+                      <a:t>Warmwasser</a:t>
+                    </a:r>
+                    <a:r>
+                      <a:rPr lang="en-US" sz="1700" b="0" i="0" u="none" strike="noStrike" kern="1200" baseline="0" dirty="0">
                         <a:solidFill>
                           <a:prstClr val="black">
                             <a:lumMod val="65000"/>
@@ -2002,7 +2054,7 @@
                     <a:buFontTx/>
                     <a:buNone/>
                     <a:tabLst/>
-                    <a:defRPr sz="1600" b="0" i="0" u="none" strike="noStrike" kern="1200" baseline="0">
+                    <a:defRPr sz="1700" b="0" i="0" u="none" strike="noStrike" kern="1200" baseline="0">
                       <a:solidFill>
                         <a:prstClr val="black">
                           <a:lumMod val="65000"/>
@@ -2035,7 +2087,6 @@
                       <a:noFill/>
                     </a:ln>
                   </c15:spPr>
-                  <c15:dlblFieldTable/>
                   <c15:showDataLabelsRange val="0"/>
                 </c:ext>
                 <c:ext xmlns:c16="http://schemas.microsoft.com/office/drawing/2014/chart" uri="{C3380CC4-5D6E-409C-BE32-E72D297353CC}">
@@ -2073,7 +2124,7 @@
                       <a:buFontTx/>
                       <a:buNone/>
                       <a:tabLst/>
-                      <a:defRPr sz="1600" b="0" i="0" u="none" strike="noStrike" kern="1200" baseline="0">
+                      <a:defRPr sz="1700" b="0" i="0" u="none" strike="noStrike" kern="1200" baseline="0">
                         <a:solidFill>
                           <a:prstClr val="black">
                             <a:lumMod val="65000"/>
@@ -2085,8 +2136,17 @@
                         <a:cs typeface="+mn-cs"/>
                       </a:defRPr>
                     </a:pPr>
-                    <a:fld id="{0E90339B-9AF0-415D-A133-2662BDDFB6F1}" type="CATEGORYNAME">
-                      <a:rPr lang="en-US" smtClean="0"/>
+                    <a:r>
+                      <a:rPr lang="de-DE" sz="1700" dirty="0"/>
+                      <a:t>Beleuchtung</a:t>
+                    </a:r>
+                    <a:r>
+                      <a:rPr lang="de-DE" sz="1700" baseline="0" dirty="0"/>
+                      <a:t> und elektrische Geräte
+</a:t>
+                    </a:r>
+                    <a:fld id="{9F72BFDC-F248-48FB-92A1-266FD7FADAEF}" type="PERCENTAGE">
+                      <a:rPr lang="de-DE" sz="1700" baseline="0" dirty="0"/>
                       <a:pPr marL="0" marR="0" lvl="0" indent="0" algn="ctr" defTabSz="914400" rtl="0" eaLnBrk="1" fontAlgn="auto" latinLnBrk="0" hangingPunct="1">
                         <a:lnSpc>
                           <a:spcPct val="100000"/>
@@ -2102,40 +2162,7 @@
                         <a:buFontTx/>
                         <a:buNone/>
                         <a:tabLst/>
-                        <a:defRPr sz="1600">
-                          <a:solidFill>
-                            <a:prstClr val="black">
-                              <a:lumMod val="65000"/>
-                              <a:lumOff val="35000"/>
-                            </a:prstClr>
-                          </a:solidFill>
-                        </a:defRPr>
-                      </a:pPr>
-                      <a:t>[RUBRIKENNAME]</a:t>
-                    </a:fld>
-                    <a:r>
-                      <a:rPr lang="en-US" baseline="0" dirty="0"/>
-                      <a:t>
-</a:t>
-                    </a:r>
-                    <a:fld id="{9F72BFDC-F248-48FB-92A1-266FD7FADAEF}" type="PERCENTAGE">
-                      <a:rPr lang="en-US" baseline="0" dirty="0"/>
-                      <a:pPr marL="0" marR="0" lvl="0" indent="0" algn="ctr" defTabSz="914400" rtl="0" eaLnBrk="1" fontAlgn="auto" latinLnBrk="0" hangingPunct="1">
-                        <a:lnSpc>
-                          <a:spcPct val="100000"/>
-                        </a:lnSpc>
-                        <a:spcBef>
-                          <a:spcPts val="0"/>
-                        </a:spcBef>
-                        <a:spcAft>
-                          <a:spcPts val="0"/>
-                        </a:spcAft>
-                        <a:buClrTx/>
-                        <a:buSzTx/>
-                        <a:buFontTx/>
-                        <a:buNone/>
-                        <a:tabLst/>
-                        <a:defRPr sz="1600">
+                        <a:defRPr sz="1700">
                           <a:solidFill>
                             <a:prstClr val="black">
                               <a:lumMod val="65000"/>
@@ -2146,7 +2173,7 @@
                       </a:pPr>
                       <a:t>[PROZENTSATZ]</a:t>
                     </a:fld>
-                    <a:endParaRPr lang="en-US" baseline="0" dirty="0"/>
+                    <a:endParaRPr lang="de-DE" sz="1700" baseline="0" dirty="0"/>
                   </a:p>
                 </c:rich>
               </c:tx>
@@ -2186,7 +2213,7 @@
                     <a:buFontTx/>
                     <a:buNone/>
                     <a:tabLst/>
-                    <a:defRPr sz="1600" b="0" i="0" u="none" strike="noStrike" kern="1200" baseline="0">
+                    <a:defRPr sz="1700" b="0" i="0" u="none" strike="noStrike" kern="1200" baseline="0">
                       <a:solidFill>
                         <a:prstClr val="black">
                           <a:lumMod val="65000"/>
@@ -2243,27 +2270,100 @@
               </c:layout>
               <c:tx>
                 <c:rich>
-                  <a:bodyPr/>
+                  <a:bodyPr rot="0" spcFirstLastPara="1" vertOverflow="clip" horzOverflow="clip" vert="horz" wrap="square" lIns="36576" tIns="18288" rIns="36576" bIns="18288" anchor="ctr" anchorCtr="1">
+                    <a:spAutoFit/>
+                  </a:bodyPr>
                   <a:lstStyle/>
                   <a:p>
+                    <a:pPr>
+                      <a:defRPr sz="1700" b="0" i="0" u="none" strike="noStrike" kern="1200" baseline="0">
+                        <a:solidFill>
+                          <a:schemeClr val="dk1">
+                            <a:lumMod val="65000"/>
+                            <a:lumOff val="35000"/>
+                          </a:schemeClr>
+                        </a:solidFill>
+                        <a:latin typeface="+mn-lt"/>
+                        <a:ea typeface="+mn-ea"/>
+                        <a:cs typeface="+mn-cs"/>
+                      </a:defRPr>
+                    </a:pPr>
                     <a:r>
-                      <a:rPr lang="en-US" dirty="0" err="1"/>
+                      <a:rPr lang="en-US" sz="1700" dirty="0" err="1"/>
                       <a:t>Kochen</a:t>
                     </a:r>
                     <a:r>
-                      <a:rPr lang="en-US" baseline="0" dirty="0"/>
+                      <a:rPr lang="en-US" sz="1700" baseline="0" dirty="0"/>
                       <a:t>
 </a:t>
                     </a:r>
                     <a:fld id="{4BDBE41A-CB0F-4C75-A478-78E232456BE0}" type="PERCENTAGE">
-                      <a:rPr lang="en-US" baseline="0"/>
-                      <a:pPr/>
+                      <a:rPr lang="en-US" sz="1700" baseline="0"/>
+                      <a:pPr>
+                        <a:defRPr sz="1700"/>
+                      </a:pPr>
                       <a:t>[PROZENTSATZ]</a:t>
                     </a:fld>
-                    <a:endParaRPr lang="en-US" baseline="0" dirty="0"/>
+                    <a:endParaRPr lang="en-US" sz="1700" baseline="0" dirty="0"/>
                   </a:p>
                 </c:rich>
               </c:tx>
+              <c:numFmt formatCode="0%" sourceLinked="0"/>
+              <c:spPr>
+                <a:solidFill>
+                  <a:prstClr val="white"/>
+                </a:solidFill>
+                <a:ln w="9525" cap="flat" cmpd="sng" algn="ctr">
+                  <a:solidFill>
+                    <a:prstClr val="black">
+                      <a:lumMod val="25000"/>
+                      <a:lumOff val="75000"/>
+                    </a:prstClr>
+                  </a:solidFill>
+                  <a:prstDash val="solid"/>
+                  <a:round/>
+                  <a:headEnd type="none" w="med" len="med"/>
+                  <a:tailEnd type="none" w="med" len="med"/>
+                  <a:extLst>
+                    <a:ext uri="{C807C97D-BFC1-408E-A445-0C87EB9F89A2}">
+                      <ask:lineSketchStyleProps xmlns:ask="http://schemas.microsoft.com/office/drawing/2018/sketchyshapes" sd="0">
+                        <a:custGeom>
+                          <a:avLst/>
+                          <a:gdLst/>
+                          <a:ahLst/>
+                          <a:cxnLst/>
+                          <a:rect l="0" t="0" r="0" b="0"/>
+                          <a:pathLst/>
+                        </a:custGeom>
+                        <ask:type/>
+                      </ask:lineSketchStyleProps>
+                    </a:ext>
+                  </a:extLst>
+                </a:ln>
+                <a:effectLst/>
+              </c:spPr>
+              <c:txPr>
+                <a:bodyPr rot="0" spcFirstLastPara="1" vertOverflow="clip" horzOverflow="clip" vert="horz" wrap="square" lIns="36576" tIns="18288" rIns="36576" bIns="18288" anchor="ctr" anchorCtr="1">
+                  <a:spAutoFit/>
+                </a:bodyPr>
+                <a:lstStyle/>
+                <a:p>
+                  <a:pPr>
+                    <a:defRPr sz="1700" b="0" i="0" u="none" strike="noStrike" kern="1200" baseline="0">
+                      <a:solidFill>
+                        <a:schemeClr val="dk1">
+                          <a:lumMod val="65000"/>
+                          <a:lumOff val="35000"/>
+                        </a:schemeClr>
+                      </a:solidFill>
+                      <a:latin typeface="+mn-lt"/>
+                      <a:ea typeface="+mn-ea"/>
+                      <a:cs typeface="+mn-cs"/>
+                    </a:defRPr>
+                  </a:pPr>
+                  <a:endParaRPr lang="de-DE"/>
+                </a:p>
+              </c:txPr>
               <c:dLblPos val="bestFit"/>
               <c:showLegendKey val="0"/>
               <c:showVal val="0"/>
@@ -2273,6 +2373,18 @@
               <c:showBubbleSize val="0"/>
               <c:extLst>
                 <c:ext xmlns:c15="http://schemas.microsoft.com/office/drawing/2012/chart" uri="{CE6537A1-D6FC-4f65-9D91-7224C49458BB}">
+                  <c15:spPr xmlns:c15="http://schemas.microsoft.com/office/drawing/2012/chart">
+                    <a:prstGeom prst="wedgeRectCallout">
+                      <a:avLst>
+                        <a:gd name="adj1" fmla="val 106007"/>
+                        <a:gd name="adj2" fmla="val 57361"/>
+                      </a:avLst>
+                    </a:prstGeom>
+                    <a:noFill/>
+                    <a:ln>
+                      <a:noFill/>
+                    </a:ln>
+                  </c15:spPr>
                   <c15:dlblFieldTable/>
                   <c15:showDataLabelsRange val="0"/>
                 </c:ext>
@@ -2359,7 +2471,7 @@
                       <a:buFontTx/>
                       <a:buNone/>
                       <a:tabLst/>
-                      <a:defRPr sz="1600" b="0" i="0" u="none" strike="noStrike" kern="1200" baseline="0">
+                      <a:defRPr sz="1700" b="0" i="0" u="none" strike="noStrike" kern="1200" baseline="0">
                         <a:solidFill>
                           <a:prstClr val="black">
                             <a:lumMod val="65000"/>
@@ -2371,8 +2483,17 @@
                         <a:cs typeface="+mn-cs"/>
                       </a:defRPr>
                     </a:pPr>
-                    <a:fld id="{09872F80-F883-4BEE-B735-CC93DC42EFEA}" type="CATEGORYNAME">
-                      <a:rPr lang="en-US" smtClean="0"/>
+                    <a:r>
+                      <a:rPr lang="en-US" sz="1700" dirty="0" err="1"/>
+                      <a:t>Klimatisierung</a:t>
+                    </a:r>
+                    <a:r>
+                      <a:rPr lang="en-US" sz="1700" baseline="0" dirty="0"/>
+                      <a:t>
+</a:t>
+                    </a:r>
+                    <a:fld id="{0FDDD5BB-BA47-4F76-BD18-27B52C935BB7}" type="PERCENTAGE">
+                      <a:rPr lang="en-US" sz="1700" baseline="0" dirty="0"/>
                       <a:pPr marL="0" marR="0" lvl="0" indent="0" algn="ctr" defTabSz="914400" rtl="0" eaLnBrk="1" fontAlgn="auto" latinLnBrk="0" hangingPunct="1">
                         <a:lnSpc>
                           <a:spcPct val="100000"/>
@@ -2388,40 +2509,7 @@
                         <a:buFontTx/>
                         <a:buNone/>
                         <a:tabLst/>
-                        <a:defRPr sz="1600">
-                          <a:solidFill>
-                            <a:prstClr val="black">
-                              <a:lumMod val="65000"/>
-                              <a:lumOff val="35000"/>
-                            </a:prstClr>
-                          </a:solidFill>
-                        </a:defRPr>
-                      </a:pPr>
-                      <a:t>[RUBRIKENNAME]</a:t>
-                    </a:fld>
-                    <a:r>
-                      <a:rPr lang="en-US" baseline="0" dirty="0"/>
-                      <a:t>
-</a:t>
-                    </a:r>
-                    <a:fld id="{0FDDD5BB-BA47-4F76-BD18-27B52C935BB7}" type="PERCENTAGE">
-                      <a:rPr lang="en-US" baseline="0" dirty="0"/>
-                      <a:pPr marL="0" marR="0" lvl="0" indent="0" algn="ctr" defTabSz="914400" rtl="0" eaLnBrk="1" fontAlgn="auto" latinLnBrk="0" hangingPunct="1">
-                        <a:lnSpc>
-                          <a:spcPct val="100000"/>
-                        </a:lnSpc>
-                        <a:spcBef>
-                          <a:spcPts val="0"/>
-                        </a:spcBef>
-                        <a:spcAft>
-                          <a:spcPts val="0"/>
-                        </a:spcAft>
-                        <a:buClrTx/>
-                        <a:buSzTx/>
-                        <a:buFontTx/>
-                        <a:buNone/>
-                        <a:tabLst/>
-                        <a:defRPr sz="1600">
+                        <a:defRPr sz="1700">
                           <a:solidFill>
                             <a:prstClr val="black">
                               <a:lumMod val="65000"/>
@@ -2432,7 +2520,7 @@
                       </a:pPr>
                       <a:t>[PROZENTSATZ]</a:t>
                     </a:fld>
-                    <a:endParaRPr lang="en-US" baseline="0" dirty="0"/>
+                    <a:endParaRPr lang="en-US" sz="1700" baseline="0" dirty="0"/>
                   </a:p>
                 </c:rich>
               </c:tx>
@@ -2441,13 +2529,32 @@
                 <a:solidFill>
                   <a:prstClr val="white"/>
                 </a:solidFill>
-                <a:ln>
+                <a:ln w="9525" cap="flat" cmpd="sng" algn="ctr">
                   <a:solidFill>
                     <a:prstClr val="black">
                       <a:lumMod val="25000"/>
                       <a:lumOff val="75000"/>
                     </a:prstClr>
                   </a:solidFill>
+                  <a:prstDash val="solid"/>
+                  <a:round/>
+                  <a:headEnd type="none" w="med" len="med"/>
+                  <a:tailEnd type="none" w="med" len="med"/>
+                  <a:extLst>
+                    <a:ext uri="{C807C97D-BFC1-408E-A445-0C87EB9F89A2}">
+                      <ask:lineSketchStyleProps xmlns:ask="http://schemas.microsoft.com/office/drawing/2018/sketchyshapes" sd="0">
+                        <a:custGeom>
+                          <a:avLst/>
+                          <a:gdLst/>
+                          <a:ahLst/>
+                          <a:cxnLst/>
+                          <a:rect l="0" t="0" r="0" b="0"/>
+                          <a:pathLst/>
+                        </a:custGeom>
+                        <ask:type/>
+                      </ask:lineSketchStyleProps>
+                    </a:ext>
+                  </a:extLst>
                 </a:ln>
                 <a:effectLst/>
               </c:spPr>
@@ -2472,7 +2579,7 @@
                     <a:buFontTx/>
                     <a:buNone/>
                     <a:tabLst/>
-                    <a:defRPr sz="1600" b="0" i="0" u="none" strike="noStrike" kern="1200" baseline="0">
+                    <a:defRPr sz="1700" b="0" i="0" u="none" strike="noStrike" kern="1200" baseline="0">
                       <a:solidFill>
                         <a:prstClr val="black">
                           <a:lumMod val="65000"/>
@@ -2498,7 +2605,10 @@
                 <c:ext xmlns:c15="http://schemas.microsoft.com/office/drawing/2012/chart" uri="{CE6537A1-D6FC-4f65-9D91-7224C49458BB}">
                   <c15:spPr xmlns:c15="http://schemas.microsoft.com/office/drawing/2012/chart">
                     <a:prstGeom prst="wedgeRectCallout">
-                      <a:avLst/>
+                      <a:avLst>
+                        <a:gd name="adj1" fmla="val -110213"/>
+                        <a:gd name="adj2" fmla="val 66089"/>
+                      </a:avLst>
                     </a:prstGeom>
                     <a:noFill/>
                     <a:ln>
@@ -2577,7 +2687,7 @@
               <a:lstStyle/>
               <a:p>
                 <a:pPr>
-                  <a:defRPr sz="1600" b="0" i="0" u="none" strike="noStrike" kern="1200" baseline="0">
+                  <a:defRPr sz="1700" b="0" i="0" u="none" strike="noStrike" kern="1200" baseline="0">
                     <a:solidFill>
                       <a:schemeClr val="dk1">
                         <a:lumMod val="65000"/>
@@ -6001,7 +6111,7 @@
           <a:p>
             <a:fld id="{8A030DEA-C216-4D3D-A947-89515275F5B4}" type="datetimeFigureOut">
               <a:rPr lang="en-US" smtClean="0"/>
-              <a:t>1/9/2025</a:t>
+              <a:t>2/21/2025</a:t>
             </a:fld>
             <a:endParaRPr lang="en-US"/>
           </a:p>
@@ -6502,7 +6612,7 @@
           <a:p>
             <a:fld id="{2AA41F33-A41D-49DC-A504-BD4F3552533D}" type="datetimeFigureOut">
               <a:rPr lang="en-US" smtClean="0"/>
-              <a:t>1/9/2025</a:t>
+              <a:t>2/21/2025</a:t>
             </a:fld>
             <a:endParaRPr lang="en-US"/>
           </a:p>
@@ -6702,7 +6812,7 @@
           <a:p>
             <a:fld id="{2AA41F33-A41D-49DC-A504-BD4F3552533D}" type="datetimeFigureOut">
               <a:rPr lang="en-US" smtClean="0"/>
-              <a:t>1/9/2025</a:t>
+              <a:t>2/21/2025</a:t>
             </a:fld>
             <a:endParaRPr lang="en-US"/>
           </a:p>
@@ -6912,7 +7022,7 @@
           <a:p>
             <a:fld id="{2AA41F33-A41D-49DC-A504-BD4F3552533D}" type="datetimeFigureOut">
               <a:rPr lang="en-US" smtClean="0"/>
-              <a:t>1/9/2025</a:t>
+              <a:t>2/21/2025</a:t>
             </a:fld>
             <a:endParaRPr lang="en-US"/>
           </a:p>
@@ -7112,7 +7222,7 @@
           <a:p>
             <a:fld id="{2AA41F33-A41D-49DC-A504-BD4F3552533D}" type="datetimeFigureOut">
               <a:rPr lang="en-US" smtClean="0"/>
-              <a:t>1/9/2025</a:t>
+              <a:t>2/21/2025</a:t>
             </a:fld>
             <a:endParaRPr lang="en-US"/>
           </a:p>
@@ -7388,7 +7498,7 @@
           <a:p>
             <a:fld id="{2AA41F33-A41D-49DC-A504-BD4F3552533D}" type="datetimeFigureOut">
               <a:rPr lang="en-US" smtClean="0"/>
-              <a:t>1/9/2025</a:t>
+              <a:t>2/21/2025</a:t>
             </a:fld>
             <a:endParaRPr lang="en-US"/>
           </a:p>
@@ -7656,7 +7766,7 @@
           <a:p>
             <a:fld id="{2AA41F33-A41D-49DC-A504-BD4F3552533D}" type="datetimeFigureOut">
               <a:rPr lang="en-US" smtClean="0"/>
-              <a:t>1/9/2025</a:t>
+              <a:t>2/21/2025</a:t>
             </a:fld>
             <a:endParaRPr lang="en-US"/>
           </a:p>
@@ -8071,7 +8181,7 @@
           <a:p>
             <a:fld id="{2AA41F33-A41D-49DC-A504-BD4F3552533D}" type="datetimeFigureOut">
               <a:rPr lang="en-US" smtClean="0"/>
-              <a:t>1/9/2025</a:t>
+              <a:t>2/21/2025</a:t>
             </a:fld>
             <a:endParaRPr lang="en-US"/>
           </a:p>
@@ -8213,7 +8323,7 @@
           <a:p>
             <a:fld id="{2AA41F33-A41D-49DC-A504-BD4F3552533D}" type="datetimeFigureOut">
               <a:rPr lang="en-US" smtClean="0"/>
-              <a:t>1/9/2025</a:t>
+              <a:t>2/21/2025</a:t>
             </a:fld>
             <a:endParaRPr lang="en-US"/>
           </a:p>
@@ -8326,7 +8436,7 @@
           <a:p>
             <a:fld id="{2AA41F33-A41D-49DC-A504-BD4F3552533D}" type="datetimeFigureOut">
               <a:rPr lang="en-US" smtClean="0"/>
-              <a:t>1/9/2025</a:t>
+              <a:t>2/21/2025</a:t>
             </a:fld>
             <a:endParaRPr lang="en-US"/>
           </a:p>
@@ -8639,7 +8749,7 @@
           <a:p>
             <a:fld id="{2AA41F33-A41D-49DC-A504-BD4F3552533D}" type="datetimeFigureOut">
               <a:rPr lang="en-US" smtClean="0"/>
-              <a:t>1/9/2025</a:t>
+              <a:t>2/21/2025</a:t>
             </a:fld>
             <a:endParaRPr lang="en-US"/>
           </a:p>
@@ -8928,7 +9038,7 @@
           <a:p>
             <a:fld id="{2AA41F33-A41D-49DC-A504-BD4F3552533D}" type="datetimeFigureOut">
               <a:rPr lang="en-US" smtClean="0"/>
-              <a:t>1/9/2025</a:t>
+              <a:t>2/21/2025</a:t>
             </a:fld>
             <a:endParaRPr lang="en-US"/>
           </a:p>
@@ -9171,7 +9281,7 @@
           <a:p>
             <a:fld id="{2AA41F33-A41D-49DC-A504-BD4F3552533D}" type="datetimeFigureOut">
               <a:rPr lang="en-US" smtClean="0"/>
-              <a:t>1/9/2025</a:t>
+              <a:t>2/21/2025</a:t>
             </a:fld>
             <a:endParaRPr lang="en-US"/>
           </a:p>
@@ -9852,7 +9962,7 @@
             <p:ph idx="1"/>
             <p:extLst>
               <p:ext uri="{D42A27DB-BD31-4B8C-83A1-F6EECF244321}">
-                <p14:modId xmlns:p14="http://schemas.microsoft.com/office/powerpoint/2010/main" val="2653674517"/>
+                <p14:modId xmlns:p14="http://schemas.microsoft.com/office/powerpoint/2010/main" val="151491228"/>
               </p:ext>
             </p:extLst>
           </p:nvPr>
@@ -9895,7 +10005,7 @@
         <p:spPr>
           <a:xfrm>
             <a:off x="4326658" y="5358383"/>
-            <a:ext cx="734291" cy="1289487"/>
+            <a:ext cx="734291" cy="1289486"/>
           </a:xfrm>
           <a:prstGeom prst="rect">
             <a:avLst/>
@@ -10167,7 +10277,7 @@
             <p:ph idx="1"/>
             <p:extLst>
               <p:ext uri="{D42A27DB-BD31-4B8C-83A1-F6EECF244321}">
-                <p14:modId xmlns:p14="http://schemas.microsoft.com/office/powerpoint/2010/main" val="2506032838"/>
+                <p14:modId xmlns:p14="http://schemas.microsoft.com/office/powerpoint/2010/main" val="1386513145"/>
               </p:ext>
             </p:extLst>
           </p:nvPr>
@@ -10210,7 +10320,7 @@
         <p:spPr>
           <a:xfrm>
             <a:off x="4326658" y="5358383"/>
-            <a:ext cx="734291" cy="1289487"/>
+            <a:ext cx="734291" cy="1289486"/>
           </a:xfrm>
           <a:prstGeom prst="rect">
             <a:avLst/>
@@ -10473,7 +10583,7 @@
           <p:nvPr>
             <p:extLst>
               <p:ext uri="{D42A27DB-BD31-4B8C-83A1-F6EECF244321}">
-                <p14:modId xmlns:p14="http://schemas.microsoft.com/office/powerpoint/2010/main" val="2373258079"/>
+                <p14:modId xmlns:p14="http://schemas.microsoft.com/office/powerpoint/2010/main" val="1802985529"/>
               </p:ext>
             </p:extLst>
           </p:nvPr>
@@ -10598,7 +10708,7 @@
       </p:pic>
       <p:pic>
         <p:nvPicPr>
-          <p:cNvPr id="4" name="Grafik 3" descr="Ein Bild, das Schwarz, Dunkelheit enthält.&#10;&#10;Automatisch generierte Beschreibung">
+          <p:cNvPr id="4" name="Grafik 3">
             <a:extLst>
               <a:ext uri="{FF2B5EF4-FFF2-40B4-BE49-F238E27FC236}">
                 <a16:creationId xmlns:a16="http://schemas.microsoft.com/office/drawing/2014/main" id="{2CA6717C-84FD-DE75-7044-B6ED54174332}"/>
@@ -10618,14 +10728,13 @@
               </a:ext>
             </a:extLst>
           </a:blip>
-          <a:stretch>
-            <a:fillRect/>
-          </a:stretch>
+          <a:srcRect/>
+          <a:stretch/>
         </p:blipFill>
         <p:spPr>
           <a:xfrm>
             <a:off x="4603755" y="2453587"/>
-            <a:ext cx="581051" cy="682103"/>
+            <a:ext cx="581050" cy="682103"/>
           </a:xfrm>
           <a:prstGeom prst="rect">
             <a:avLst/>
@@ -10681,7 +10790,7 @@
           <p:nvPr>
             <p:extLst>
               <p:ext uri="{D42A27DB-BD31-4B8C-83A1-F6EECF244321}">
-                <p14:modId xmlns:p14="http://schemas.microsoft.com/office/powerpoint/2010/main" val="2349039214"/>
+                <p14:modId xmlns:p14="http://schemas.microsoft.com/office/powerpoint/2010/main" val="3836345571"/>
               </p:ext>
             </p:extLst>
           </p:nvPr>
@@ -10806,7 +10915,7 @@
       </p:pic>
       <p:pic>
         <p:nvPicPr>
-          <p:cNvPr id="4" name="Grafik 3" descr="Ein Bild, das Schwarz, Dunkelheit enthält.&#10;&#10;Automatisch generierte Beschreibung">
+          <p:cNvPr id="4" name="Grafik 3">
             <a:extLst>
               <a:ext uri="{FF2B5EF4-FFF2-40B4-BE49-F238E27FC236}">
                 <a16:creationId xmlns:a16="http://schemas.microsoft.com/office/drawing/2014/main" id="{CDBBC818-8B56-4DE5-B29F-19775F9B32F7}"/>
@@ -10826,14 +10935,13 @@
               </a:ext>
             </a:extLst>
           </a:blip>
-          <a:stretch>
-            <a:fillRect/>
-          </a:stretch>
+          <a:srcRect/>
+          <a:stretch/>
         </p:blipFill>
         <p:spPr>
           <a:xfrm>
             <a:off x="4603755" y="2453587"/>
-            <a:ext cx="581051" cy="682103"/>
+            <a:ext cx="581050" cy="682103"/>
           </a:xfrm>
           <a:prstGeom prst="rect">
             <a:avLst/>
@@ -11203,19 +11311,18 @@
         <p:blipFill>
           <a:blip r:embed="rId9">
             <a:extLst>
-              <a:ext uri="{96DAC541-7B7A-43D3-8B79-37D633B846F1}">
-                <asvg:svgBlip xmlns:asvg="http://schemas.microsoft.com/office/drawing/2016/SVG/main" r:embed="rId10"/>
+              <a:ext uri="{28A0092B-C50C-407E-A947-70E740481C1C}">
+                <a14:useLocalDpi xmlns:a14="http://schemas.microsoft.com/office/drawing/2010/main" val="0"/>
               </a:ext>
             </a:extLst>
           </a:blip>
-          <a:stretch>
-            <a:fillRect/>
-          </a:stretch>
+          <a:srcRect/>
+          <a:stretch/>
         </p:blipFill>
         <p:spPr>
           <a:xfrm>
-            <a:off x="9207635" y="4546607"/>
-            <a:ext cx="599829" cy="417404"/>
+            <a:off x="9316703" y="4547287"/>
+            <a:ext cx="494028" cy="417404"/>
           </a:xfrm>
           <a:prstGeom prst="rect">
             <a:avLst/>
@@ -12121,19 +12228,18 @@
         <p:blipFill>
           <a:blip r:embed="rId9">
             <a:extLst>
-              <a:ext uri="{96DAC541-7B7A-43D3-8B79-37D633B846F1}">
-                <asvg:svgBlip xmlns:asvg="http://schemas.microsoft.com/office/drawing/2016/SVG/main" r:embed="rId10"/>
+              <a:ext uri="{28A0092B-C50C-407E-A947-70E740481C1C}">
+                <a14:useLocalDpi xmlns:a14="http://schemas.microsoft.com/office/drawing/2010/main" val="0"/>
               </a:ext>
             </a:extLst>
           </a:blip>
-          <a:stretch>
-            <a:fillRect/>
-          </a:stretch>
+          <a:srcRect/>
+          <a:stretch/>
         </p:blipFill>
         <p:spPr>
           <a:xfrm>
-            <a:off x="9207635" y="4546607"/>
-            <a:ext cx="599829" cy="417404"/>
+            <a:off x="9308121" y="4547287"/>
+            <a:ext cx="494028" cy="417404"/>
           </a:xfrm>
           <a:prstGeom prst="rect">
             <a:avLst/>

--- a/z_Auxilliary/Figures.pptx
+++ b/z_Auxilliary/Figures.pptx
@@ -6111,7 +6111,7 @@
           <a:p>
             <a:fld id="{8A030DEA-C216-4D3D-A947-89515275F5B4}" type="datetimeFigureOut">
               <a:rPr lang="en-US" smtClean="0"/>
-              <a:t>2/21/2025</a:t>
+              <a:t>5/30/2025</a:t>
             </a:fld>
             <a:endParaRPr lang="en-US"/>
           </a:p>
@@ -6612,7 +6612,7 @@
           <a:p>
             <a:fld id="{2AA41F33-A41D-49DC-A504-BD4F3552533D}" type="datetimeFigureOut">
               <a:rPr lang="en-US" smtClean="0"/>
-              <a:t>2/21/2025</a:t>
+              <a:t>5/30/2025</a:t>
             </a:fld>
             <a:endParaRPr lang="en-US"/>
           </a:p>
@@ -6812,7 +6812,7 @@
           <a:p>
             <a:fld id="{2AA41F33-A41D-49DC-A504-BD4F3552533D}" type="datetimeFigureOut">
               <a:rPr lang="en-US" smtClean="0"/>
-              <a:t>2/21/2025</a:t>
+              <a:t>5/30/2025</a:t>
             </a:fld>
             <a:endParaRPr lang="en-US"/>
           </a:p>
@@ -7022,7 +7022,7 @@
           <a:p>
             <a:fld id="{2AA41F33-A41D-49DC-A504-BD4F3552533D}" type="datetimeFigureOut">
               <a:rPr lang="en-US" smtClean="0"/>
-              <a:t>2/21/2025</a:t>
+              <a:t>5/30/2025</a:t>
             </a:fld>
             <a:endParaRPr lang="en-US"/>
           </a:p>
@@ -7222,7 +7222,7 @@
           <a:p>
             <a:fld id="{2AA41F33-A41D-49DC-A504-BD4F3552533D}" type="datetimeFigureOut">
               <a:rPr lang="en-US" smtClean="0"/>
-              <a:t>2/21/2025</a:t>
+              <a:t>5/30/2025</a:t>
             </a:fld>
             <a:endParaRPr lang="en-US"/>
           </a:p>
@@ -7498,7 +7498,7 @@
           <a:p>
             <a:fld id="{2AA41F33-A41D-49DC-A504-BD4F3552533D}" type="datetimeFigureOut">
               <a:rPr lang="en-US" smtClean="0"/>
-              <a:t>2/21/2025</a:t>
+              <a:t>5/30/2025</a:t>
             </a:fld>
             <a:endParaRPr lang="en-US"/>
           </a:p>
@@ -7766,7 +7766,7 @@
           <a:p>
             <a:fld id="{2AA41F33-A41D-49DC-A504-BD4F3552533D}" type="datetimeFigureOut">
               <a:rPr lang="en-US" smtClean="0"/>
-              <a:t>2/21/2025</a:t>
+              <a:t>5/30/2025</a:t>
             </a:fld>
             <a:endParaRPr lang="en-US"/>
           </a:p>
@@ -8181,7 +8181,7 @@
           <a:p>
             <a:fld id="{2AA41F33-A41D-49DC-A504-BD4F3552533D}" type="datetimeFigureOut">
               <a:rPr lang="en-US" smtClean="0"/>
-              <a:t>2/21/2025</a:t>
+              <a:t>5/30/2025</a:t>
             </a:fld>
             <a:endParaRPr lang="en-US"/>
           </a:p>
@@ -8323,7 +8323,7 @@
           <a:p>
             <a:fld id="{2AA41F33-A41D-49DC-A504-BD4F3552533D}" type="datetimeFigureOut">
               <a:rPr lang="en-US" smtClean="0"/>
-              <a:t>2/21/2025</a:t>
+              <a:t>5/30/2025</a:t>
             </a:fld>
             <a:endParaRPr lang="en-US"/>
           </a:p>
@@ -8436,7 +8436,7 @@
           <a:p>
             <a:fld id="{2AA41F33-A41D-49DC-A504-BD4F3552533D}" type="datetimeFigureOut">
               <a:rPr lang="en-US" smtClean="0"/>
-              <a:t>2/21/2025</a:t>
+              <a:t>5/30/2025</a:t>
             </a:fld>
             <a:endParaRPr lang="en-US"/>
           </a:p>
@@ -8749,7 +8749,7 @@
           <a:p>
             <a:fld id="{2AA41F33-A41D-49DC-A504-BD4F3552533D}" type="datetimeFigureOut">
               <a:rPr lang="en-US" smtClean="0"/>
-              <a:t>2/21/2025</a:t>
+              <a:t>5/30/2025</a:t>
             </a:fld>
             <a:endParaRPr lang="en-US"/>
           </a:p>
@@ -9038,7 +9038,7 @@
           <a:p>
             <a:fld id="{2AA41F33-A41D-49DC-A504-BD4F3552533D}" type="datetimeFigureOut">
               <a:rPr lang="en-US" smtClean="0"/>
-              <a:t>2/21/2025</a:t>
+              <a:t>5/30/2025</a:t>
             </a:fld>
             <a:endParaRPr lang="en-US"/>
           </a:p>
@@ -9281,7 +9281,7 @@
           <a:p>
             <a:fld id="{2AA41F33-A41D-49DC-A504-BD4F3552533D}" type="datetimeFigureOut">
               <a:rPr lang="en-US" smtClean="0"/>
-              <a:t>2/21/2025</a:t>
+              <a:t>5/30/2025</a:t>
             </a:fld>
             <a:endParaRPr lang="en-US"/>
           </a:p>
@@ -11657,7 +11657,7 @@
           <a:p>
             <a:r>
               <a:rPr lang="en-US" sz="2800" b="1" dirty="0"/>
-              <a:t>9,4 t</a:t>
+              <a:t>9.4 t</a:t>
             </a:r>
           </a:p>
         </p:txBody>
@@ -11731,7 +11731,7 @@
           <a:p>
             <a:r>
               <a:rPr lang="en-US" sz="2800" b="1" dirty="0"/>
-              <a:t>7,34 t</a:t>
+              <a:t>7.34 t</a:t>
             </a:r>
           </a:p>
         </p:txBody>
@@ -11805,7 +11805,7 @@
           <a:p>
             <a:r>
               <a:rPr lang="en-US" sz="2800" b="1" dirty="0"/>
-              <a:t>1,87 t</a:t>
+              <a:t>1.87 t</a:t>
             </a:r>
           </a:p>
         </p:txBody>
@@ -11879,7 +11879,7 @@
           <a:p>
             <a:r>
               <a:rPr lang="en-US" sz="2800" b="1" dirty="0"/>
-              <a:t>0,07 t</a:t>
+              <a:t>0.07 t</a:t>
             </a:r>
           </a:p>
         </p:txBody>
@@ -12706,7 +12706,7 @@
             <a:pPr algn="ctr"/>
             <a:r>
               <a:rPr lang="de-DE" sz="2000" dirty="0"/>
-              <a:t>(Effizienz 90%)</a:t>
+              <a:t>(Effizienz 90 %)</a:t>
             </a:r>
           </a:p>
         </p:txBody>
@@ -12725,8 +12725,8 @@
         </p:nvSpPr>
         <p:spPr>
           <a:xfrm>
-            <a:off x="6371049" y="5542216"/>
-            <a:ext cx="1923205" cy="707886"/>
+            <a:off x="6338198" y="5542216"/>
+            <a:ext cx="2019349" cy="707886"/>
           </a:xfrm>
           <a:prstGeom prst="rect">
             <a:avLst/>
@@ -12749,7 +12749,7 @@
             <a:pPr algn="ctr"/>
             <a:r>
               <a:rPr lang="de-DE" sz="2000" dirty="0"/>
-              <a:t>(Effizienz 380%)</a:t>
+              <a:t>(Effizienz 380 %)</a:t>
             </a:r>
           </a:p>
         </p:txBody>
@@ -12768,8 +12768,8 @@
         </p:nvSpPr>
         <p:spPr>
           <a:xfrm>
-            <a:off x="8643760" y="5542216"/>
-            <a:ext cx="1922767" cy="1015663"/>
+            <a:off x="8618187" y="5542216"/>
+            <a:ext cx="2019349" cy="1015663"/>
           </a:xfrm>
           <a:prstGeom prst="rect">
             <a:avLst/>
@@ -12792,7 +12792,7 @@
             <a:pPr algn="ctr"/>
             <a:r>
               <a:rPr lang="de-DE" sz="2000" dirty="0"/>
-              <a:t>(Effizienz 380%)</a:t>
+              <a:t>(Effizienz 380 %)</a:t>
             </a:r>
           </a:p>
         </p:txBody>
@@ -12835,7 +12835,7 @@
             <a:pPr algn="ctr"/>
             <a:r>
               <a:rPr lang="de-DE" sz="2000" dirty="0"/>
-              <a:t>(Effizienz 90%)</a:t>
+              <a:t>(Effizienz 90 %)</a:t>
             </a:r>
           </a:p>
         </p:txBody>
